--- a/guides/problems/navier-stokes/output/Navier_Stokes_Brief_v1.0.0_EN.pptx
+++ b/guides/problems/navier-stokes/output/Navier_Stokes_Brief_v1.0.0_EN.pptx
@@ -65,7 +65,7 @@
         <p:txBody>
           <a:bodyPr/>
           <a:p>
-            <a:fld id="{8CAE0E28-F0CF-428F-A6B1-DCDF94FC6FAB}" type="slidenum">
+            <a:fld id="{141DCCD8-9F96-4EE0-95B8-C8E16F48A773}" type="slidenum">
               <a:t>&lt;#&gt;</a:t>
             </a:fld>
           </a:p>
@@ -253,7 +253,7 @@
         <p:txBody>
           <a:bodyPr/>
           <a:p>
-            <a:fld id="{216BB571-E0AA-49AA-A59D-BCDB464E6D60}" type="slidenum">
+            <a:fld id="{FEFE308B-0143-40EE-9E18-99D7CFF964AD}" type="slidenum">
               <a:t>&lt;#&gt;</a:t>
             </a:fld>
           </a:p>
@@ -509,7 +509,7 @@
         <p:txBody>
           <a:bodyPr/>
           <a:p>
-            <a:fld id="{DB19986D-4E72-49D7-869E-4B9E4B35A050}" type="slidenum">
+            <a:fld id="{CB98B4DE-C2B8-443C-A043-0E19F389F2AC}" type="slidenum">
               <a:t>&lt;#&gt;</a:t>
             </a:fld>
           </a:p>
@@ -833,7 +833,7 @@
         <p:txBody>
           <a:bodyPr/>
           <a:p>
-            <a:fld id="{00E0CE3E-1932-4EDF-9A55-6457E8EA1150}" type="slidenum">
+            <a:fld id="{5BF5A211-533D-41CE-A0EB-6628744DAE83}" type="slidenum">
               <a:t>&lt;#&gt;</a:t>
             </a:fld>
           </a:p>
@@ -990,7 +990,7 @@
         <p:txBody>
           <a:bodyPr/>
           <a:p>
-            <a:fld id="{B2A216B4-9C01-4740-BFEA-03F5FCBE8048}" type="slidenum">
+            <a:fld id="{AF536E4D-0F7C-4AF1-95D1-211FEBD1681A}" type="slidenum">
               <a:t>&lt;#&gt;</a:t>
             </a:fld>
           </a:p>
@@ -1144,7 +1144,7 @@
         <p:txBody>
           <a:bodyPr/>
           <a:p>
-            <a:fld id="{FD9401A1-E728-4917-A265-7F599C475108}" type="slidenum">
+            <a:fld id="{F02B3AA3-AC82-45C5-92B5-6271878C44EB}" type="slidenum">
               <a:t>&lt;#&gt;</a:t>
             </a:fld>
           </a:p>
@@ -1332,7 +1332,7 @@
         <p:txBody>
           <a:bodyPr/>
           <a:p>
-            <a:fld id="{A900D387-E108-4668-853B-129D5C2034D8}" type="slidenum">
+            <a:fld id="{498D0A62-7BEC-4175-94E2-F67E9D7B9AA1}" type="slidenum">
               <a:t>&lt;#&gt;</a:t>
             </a:fld>
           </a:p>
@@ -1452,7 +1452,7 @@
         <p:txBody>
           <a:bodyPr/>
           <a:p>
-            <a:fld id="{62121001-C841-420C-957B-640BE712752E}" type="slidenum">
+            <a:fld id="{BBC9C953-7F45-4F27-9F4C-305EC4C4F25B}" type="slidenum">
               <a:t>&lt;#&gt;</a:t>
             </a:fld>
           </a:p>
@@ -1572,7 +1572,7 @@
         <p:txBody>
           <a:bodyPr/>
           <a:p>
-            <a:fld id="{5EBD48DA-2954-4E8C-AA98-370D3135AA07}" type="slidenum">
+            <a:fld id="{EF5FDEBE-B8A2-4C9A-B878-ABC4A75ED1C3}" type="slidenum">
               <a:t>&lt;#&gt;</a:t>
             </a:fld>
           </a:p>
@@ -1794,7 +1794,7 @@
         <p:txBody>
           <a:bodyPr/>
           <a:p>
-            <a:fld id="{2735B52D-AE0F-4845-8890-43DF466E95F8}" type="slidenum">
+            <a:fld id="{75799FB2-CA48-4BE9-BBEE-E507C05FFFDD}" type="slidenum">
               <a:t>&lt;#&gt;</a:t>
             </a:fld>
           </a:p>
@@ -2016,7 +2016,7 @@
         <p:txBody>
           <a:bodyPr/>
           <a:p>
-            <a:fld id="{8FB4358D-2C21-496F-91B4-B7AFDD2937B1}" type="slidenum">
+            <a:fld id="{3C5D2328-5D8D-4E52-9160-D5E9A3151EE4}" type="slidenum">
               <a:t>&lt;#&gt;</a:t>
             </a:fld>
           </a:p>
@@ -2238,7 +2238,7 @@
         <p:txBody>
           <a:bodyPr/>
           <a:p>
-            <a:fld id="{292ABB12-0C00-47AE-90BB-4980629448F2}" type="slidenum">
+            <a:fld id="{1271A483-1672-40A5-A3F0-E24686B9B260}" type="slidenum">
               <a:t>&lt;#&gt;</a:t>
             </a:fld>
           </a:p>
@@ -2650,7 +2650,7 @@
             <a:pPr algn="r">
               <a:buNone/>
             </a:pPr>
-            <a:fld id="{488548B7-1184-4787-B6B3-E4581F7E34DD}" type="slidenum">
+            <a:fld id="{D86BB2AE-CDAD-4729-8F90-8019EFEDDB9C}" type="slidenum">
               <a:rPr b="0" lang="en-US" sz="1400" spc="-1" strike="noStrike">
                 <a:latin typeface="Times New Roman"/>
               </a:rPr>

--- a/guides/problems/navier-stokes/output/Navier_Stokes_Brief_v1.0.0_EN.pptx
+++ b/guides/problems/navier-stokes/output/Navier_Stokes_Brief_v1.0.0_EN.pptx
@@ -65,7 +65,7 @@
         <p:txBody>
           <a:bodyPr/>
           <a:p>
-            <a:fld id="{141DCCD8-9F96-4EE0-95B8-C8E16F48A773}" type="slidenum">
+            <a:fld id="{83A88482-D1C0-48E4-849C-93FDA4936D0C}" type="slidenum">
               <a:t>&lt;#&gt;</a:t>
             </a:fld>
           </a:p>
@@ -253,7 +253,7 @@
         <p:txBody>
           <a:bodyPr/>
           <a:p>
-            <a:fld id="{FEFE308B-0143-40EE-9E18-99D7CFF964AD}" type="slidenum">
+            <a:fld id="{49FE4C7A-F59E-4E12-8D68-0A0AB0606B19}" type="slidenum">
               <a:t>&lt;#&gt;</a:t>
             </a:fld>
           </a:p>
@@ -509,7 +509,7 @@
         <p:txBody>
           <a:bodyPr/>
           <a:p>
-            <a:fld id="{CB98B4DE-C2B8-443C-A043-0E19F389F2AC}" type="slidenum">
+            <a:fld id="{E4E4041F-C160-402D-A771-4C3012C92DA2}" type="slidenum">
               <a:t>&lt;#&gt;</a:t>
             </a:fld>
           </a:p>
@@ -833,7 +833,7 @@
         <p:txBody>
           <a:bodyPr/>
           <a:p>
-            <a:fld id="{5BF5A211-533D-41CE-A0EB-6628744DAE83}" type="slidenum">
+            <a:fld id="{6C0A6944-ACF3-48DF-8A4C-B8455E11E92A}" type="slidenum">
               <a:t>&lt;#&gt;</a:t>
             </a:fld>
           </a:p>
@@ -990,7 +990,7 @@
         <p:txBody>
           <a:bodyPr/>
           <a:p>
-            <a:fld id="{AF536E4D-0F7C-4AF1-95D1-211FEBD1681A}" type="slidenum">
+            <a:fld id="{8C8C2D22-9299-4003-865E-8D3172585158}" type="slidenum">
               <a:t>&lt;#&gt;</a:t>
             </a:fld>
           </a:p>
@@ -1144,7 +1144,7 @@
         <p:txBody>
           <a:bodyPr/>
           <a:p>
-            <a:fld id="{F02B3AA3-AC82-45C5-92B5-6271878C44EB}" type="slidenum">
+            <a:fld id="{0E0CE148-5095-4448-BEC8-ED9AF369A087}" type="slidenum">
               <a:t>&lt;#&gt;</a:t>
             </a:fld>
           </a:p>
@@ -1332,7 +1332,7 @@
         <p:txBody>
           <a:bodyPr/>
           <a:p>
-            <a:fld id="{498D0A62-7BEC-4175-94E2-F67E9D7B9AA1}" type="slidenum">
+            <a:fld id="{EE37208B-1015-4F2B-A7D5-F3027ADD20AD}" type="slidenum">
               <a:t>&lt;#&gt;</a:t>
             </a:fld>
           </a:p>
@@ -1452,7 +1452,7 @@
         <p:txBody>
           <a:bodyPr/>
           <a:p>
-            <a:fld id="{BBC9C953-7F45-4F27-9F4C-305EC4C4F25B}" type="slidenum">
+            <a:fld id="{A35E7CE9-2DD6-4E4D-ABED-0E29E88D872D}" type="slidenum">
               <a:t>&lt;#&gt;</a:t>
             </a:fld>
           </a:p>
@@ -1572,7 +1572,7 @@
         <p:txBody>
           <a:bodyPr/>
           <a:p>
-            <a:fld id="{EF5FDEBE-B8A2-4C9A-B878-ABC4A75ED1C3}" type="slidenum">
+            <a:fld id="{94215370-0C6A-4123-B4FA-C0FAA75B9BAA}" type="slidenum">
               <a:t>&lt;#&gt;</a:t>
             </a:fld>
           </a:p>
@@ -1794,7 +1794,7 @@
         <p:txBody>
           <a:bodyPr/>
           <a:p>
-            <a:fld id="{75799FB2-CA48-4BE9-BBEE-E507C05FFFDD}" type="slidenum">
+            <a:fld id="{5FF82670-80AB-4FDA-95C7-B69A0198A40C}" type="slidenum">
               <a:t>&lt;#&gt;</a:t>
             </a:fld>
           </a:p>
@@ -2016,7 +2016,7 @@
         <p:txBody>
           <a:bodyPr/>
           <a:p>
-            <a:fld id="{3C5D2328-5D8D-4E52-9160-D5E9A3151EE4}" type="slidenum">
+            <a:fld id="{99FF6BEA-321E-4853-9050-19FBCB30BE78}" type="slidenum">
               <a:t>&lt;#&gt;</a:t>
             </a:fld>
           </a:p>
@@ -2238,7 +2238,7 @@
         <p:txBody>
           <a:bodyPr/>
           <a:p>
-            <a:fld id="{1271A483-1672-40A5-A3F0-E24686B9B260}" type="slidenum">
+            <a:fld id="{FEF03D4A-0E60-408F-B325-04152CADD608}" type="slidenum">
               <a:t>&lt;#&gt;</a:t>
             </a:fld>
           </a:p>
@@ -2650,7 +2650,7 @@
             <a:pPr algn="r">
               <a:buNone/>
             </a:pPr>
-            <a:fld id="{D86BB2AE-CDAD-4729-8F90-8019EFEDDB9C}" type="slidenum">
+            <a:fld id="{987D5A54-EA10-497D-A910-F52B8950EFCD}" type="slidenum">
               <a:rPr b="0" lang="en-US" sz="1400" spc="-1" strike="noStrike">
                 <a:latin typeface="Times New Roman"/>
               </a:rPr>
